--- a/decks/hist-slave-trade/hist-slave-trade_ch6_sources.pptx
+++ b/decks/hist-slave-trade/hist-slave-trade_ch6_sources.pptx
@@ -129,31 +129,31 @@
   <p:extLst>
     <p:ext uri="{521415D9-36F7-43E2-AB2F-B90AF26B5E84}">
       <p14:sectionLst xmlns:p14="http://schemas.microsoft.com/office/powerpoint/2010/main">
-        <p14:section name="Opening" id="{a1bc0606-c91f-9dc5-f13d-e07580aa289c}">
+        <p14:section name="Opening" id="{83586428-00ed-5b46-7863-7ad45a2d5832}">
           <p14:sldIdLst>
             <p14:sldId id="256"/>
           </p14:sldIdLst>
         </p14:section>
-        <p14:section name="Gate" id="{37d9f267-f8e2-26e0-5232-382e409b5f50}">
+        <p14:section name="Gate" id="{22c9d102-0734-0878-76da-64a4cd6209e3}">
           <p14:sldIdLst>
             <p14:sldId id="257"/>
             <p14:sldId id="258"/>
             <p14:sldId id="259"/>
           </p14:sldIdLst>
         </p14:section>
-        <p14:section name="Pre-teach" id="{d20b111d-1dd7-86f1-2c11-064b3454e856}">
+        <p14:section name="Pre-teach" id="{126c9a6e-1815-0221-ad71-5d2fde29e16c}">
           <p14:sldIdLst>
             <p14:sldId id="260"/>
             <p14:sldId id="261"/>
           </p14:sldIdLst>
         </p14:section>
-        <p14:section name="Read-along" id="{de44df54-f9df-b0f4-e385-584638e6f207}">
+        <p14:section name="Read-along" id="{dc69f4af-7fad-73b0-74a8-aa975901595b}">
           <p14:sldIdLst>
             <p14:sldId id="262"/>
             <p14:sldId id="263"/>
           </p14:sldIdLst>
         </p14:section>
-        <p14:section name="Teach" id="{4f036dfe-7d8c-b75a-0281-e59213f79ca7}">
+        <p14:section name="Teach" id="{d0be9f58-7fc8-a4c2-5940-007690e8e844}">
           <p14:sldIdLst>
             <p14:sldId id="264"/>
             <p14:sldId id="265"/>
@@ -162,7 +162,7 @@
             <p14:sldId id="268"/>
           </p14:sldIdLst>
         </p14:section>
-        <p14:section name="Routes" id="{1356ffa4-36fc-1a15-2ec3-8ea7f924b385}">
+        <p14:section name="Routes" id="{8f1aaf02-d749-1a3f-03c1-120e3946210c}">
           <p14:sldIdLst>
             <p14:sldId id="269"/>
             <p14:sldId id="270"/>
@@ -171,12 +171,12 @@
             <p14:sldId id="273"/>
           </p14:sldIdLst>
         </p14:section>
-        <p14:section name="Close" id="{9e58f311-f756-1ba4-bcd4-728ccf47d729}">
+        <p14:section name="Close" id="{4fd63539-cc96-f832-f934-ed33692534a8}">
           <p14:sldIdLst>
             <p14:sldId id="274"/>
           </p14:sldIdLst>
         </p14:section>
-        <p14:section name="Answers" id="{6e88adf5-4214-eeda-7c88-4e0b6535d7f8}">
+        <p14:section name="Answers" id="{6a3a2823-ede2-b435-5355-5e70016be5b9}">
           <p14:sldIdLst>
             <p14:sldId id="275"/>
             <p14:sldId id="276"/>
@@ -1611,9 +1611,9 @@
             <a:r>
               <a:rPr lang="en-US" dirty="0"/>
               <a:t>Do now — retrieval. Silent, no notes, no help: recall comes before any support. Give about four minutes.
-1. What does the origin of a source mean?  →  A   Who made it, when, and why
+1. What does the origin of a source mean?  →  C   Who made it, when, and why
 2. The origin of a source is also called its ___.  →  provenance
-3. Robert Norris told Parliament in 1778 that enslaved people were well fed and comfortable on slave ships. Why does his origin make the source less trustworthy?  →  A   He was a slave trader who made money from the trade, so he wanted Parliament to let it continue
+3. Robert Norris told Parliament in 1778 that enslaved people were well fed and comfortable on slave ships. Why does his origin make the source less trustworthy?  →  B   He was a slave trader who made money from the trade, so he wanted Parliament to let it continue
 Circulate: who gets 3/3 (Stretch route), 2/3 (Core), 0–1 (Support)? Use this to route pupils later in the lesson.</a:t>
             </a:r>
             <a:endParaRPr lang="en-US" dirty="0"/>
@@ -2071,9 +2071,9 @@
             <a:r>
               <a:rPr lang="en-US" dirty="0"/>
               <a:t>Do now — retrieval. Silent, no notes, no help: recall comes before any support. Give about four minutes.
-1. What does the origin of a source mean?  →  A   Who made it, when, and why
+1. What does the origin of a source mean?  →  C   Who made it, when, and why
 2. The origin of a source is also called its ___.  →  provenance
-3. Robert Norris told Parliament in 1778 that enslaved people were well fed and comfortable on slave ships. Why does his origin make the source less trustworthy?  →  A   He was a slave trader who made money from the trade, so he wanted Parliament to let it continue
+3. Robert Norris told Parliament in 1778 that enslaved people were well fed and comfortable on slave ships. Why does his origin make the source less trustworthy?  →  B   He was a slave trader who made money from the trade, so he wanted Parliament to let it continue
 Circulate: who gets 3/3 (Stretch route), 2/3 (Core), 0–1 (Support)? Use this to route pupils later in the lesson.</a:t>
             </a:r>
             <a:endParaRPr lang="en-US" dirty="0"/>
@@ -2163,9 +2163,9 @@
             <a:r>
               <a:rPr lang="en-US" dirty="0"/>
               <a:t>Answers — pupils mark their own in a different colour, then hands up for 3/3, 2/3, 1/3.
-1. A   Who made it, when, and why. Origin, or provenance, means who made the source, when they made it and why.
+1. C   Who made it, when, and why. Origin, or provenance, means who made the source, when they made it and why.
 2. provenance. Provenance is the historian's word for the origin of a source: who made it, when and why.
-3. A   He was a slave trader who made money from the trade, so he wanted Parliament to let it continue. Norris's living depended on the trade, and Parliament was deciding whether to act against it, so he had a reason to make the ships sound pleasant.
+3. B   He was a slave trader who made money from the trade, so he wanted Parliament to let it continue. Norris's living depended on the trade, and Parliament was deciding whether to act against it, so he had a reason to make the ships sound pleasant.
 Say the route each score points to: 3/3 Stretch, 2/3 Core, 0–1 Support. Pupils may choose to move up.</a:t>
             </a:r>
             <a:endParaRPr lang="en-US" dirty="0"/>
@@ -11377,7 +11377,7 @@
                 <a:ea typeface="Calibri" pitchFamily="34" charset="-122"/>
                 <a:cs typeface="Calibri" pitchFamily="34" charset="-120"/>
               </a:rPr>
-              <a:t>It makes the source more trustworthy, because the author knew the trade from the inside</a:t>
+              <a:t>It proves that everything in the source is false</a:t>
             </a:r>
             <a:endParaRPr lang="en-US" sz="2200" dirty="0"/>
           </a:p>
@@ -11451,7 +11451,7 @@
                 <a:ea typeface="Calibri" pitchFamily="34" charset="-122"/>
                 <a:cs typeface="Calibri" pitchFamily="34" charset="-120"/>
               </a:rPr>
-              <a:t>It proves that everything in the source is false</a:t>
+              <a:t>It makes the source more trustworthy, because the author knew the trade from the inside</a:t>
             </a:r>
             <a:endParaRPr lang="en-US" sz="2200" dirty="0"/>
           </a:p>
@@ -11931,7 +11931,7 @@
                 <a:ea typeface="Calibri" pitchFamily="34" charset="-122"/>
                 <a:cs typeface="Calibri" pitchFamily="34" charset="-120"/>
               </a:rPr>
-              <a:t>Who made it, when, and why</a:t>
+              <a:t>What you already know about the topic</a:t>
             </a:r>
             <a:endParaRPr lang="en-US" sz="2400" dirty="0"/>
           </a:p>
@@ -12005,7 +12005,7 @@
                 <a:ea typeface="Calibri" pitchFamily="34" charset="-122"/>
                 <a:cs typeface="Calibri" pitchFamily="34" charset="-120"/>
               </a:rPr>
-              <a:t>Whether the source is a picture or a piece of writing</a:t>
+              <a:t>Who made it, when, and why</a:t>
             </a:r>
             <a:endParaRPr lang="en-US" sz="2400" dirty="0"/>
           </a:p>
@@ -12042,7 +12042,7 @@
                 <a:ea typeface="Calibri" pitchFamily="34" charset="-122"/>
                 <a:cs typeface="Calibri" pitchFamily="34" charset="-120"/>
               </a:rPr>
-              <a:t>What you already know about the topic</a:t>
+              <a:t>Whether the source is a picture or a piece of writing</a:t>
             </a:r>
             <a:endParaRPr lang="en-US" sz="2400" dirty="0"/>
           </a:p>
@@ -14681,7 +14681,7 @@
                 <a:ea typeface="Calibri" pitchFamily="34" charset="-122"/>
                 <a:cs typeface="Calibri" pitchFamily="34" charset="-120"/>
               </a:rPr>
-              <a:t>He was a slave trader who made money from the trade, so he wanted Parliament to let it continue</a:t>
+              <a:t>He had never been on a slave ship</a:t>
             </a:r>
             <a:endParaRPr lang="en-US" sz="2400" dirty="0"/>
           </a:p>
@@ -14718,7 +14718,7 @@
                 <a:ea typeface="Calibri" pitchFamily="34" charset="-122"/>
                 <a:cs typeface="Calibri" pitchFamily="34" charset="-120"/>
               </a:rPr>
-              <a:t>He was speaking a very long time ago</a:t>
+              <a:t>He was a slave trader who made money from the trade, so he wanted Parliament to let it continue</a:t>
             </a:r>
             <a:endParaRPr lang="en-US" sz="2400" dirty="0"/>
           </a:p>
@@ -14755,7 +14755,7 @@
                 <a:ea typeface="Calibri" pitchFamily="34" charset="-122"/>
                 <a:cs typeface="Calibri" pitchFamily="34" charset="-120"/>
               </a:rPr>
-              <a:t>He was a member of Parliament himself</a:t>
+              <a:t>He was speaking a very long time ago</a:t>
             </a:r>
             <a:endParaRPr lang="en-US" sz="2400" dirty="0"/>
           </a:p>
@@ -14792,7 +14792,7 @@
                 <a:ea typeface="Calibri" pitchFamily="34" charset="-122"/>
                 <a:cs typeface="Calibri" pitchFamily="34" charset="-120"/>
               </a:rPr>
-              <a:t>He had never been on a slave ship</a:t>
+              <a:t>He was a member of Parliament himself</a:t>
             </a:r>
             <a:endParaRPr lang="en-US" sz="2400" dirty="0"/>
           </a:p>
@@ -15193,7 +15193,7 @@
                 <a:ea typeface="Calibri" pitchFamily="34" charset="-122"/>
                 <a:cs typeface="Calibri" pitchFamily="34" charset="-120"/>
               </a:rPr>
-              <a:t>A   Who made it, when, and why</a:t>
+              <a:t>C   Who made it, when, and why</a:t>
             </a:r>
             <a:endParaRPr lang="en-US" sz="2200" dirty="0"/>
           </a:p>
@@ -15693,7 +15693,7 @@
                 <a:ea typeface="Calibri" pitchFamily="34" charset="-122"/>
                 <a:cs typeface="Calibri" pitchFamily="34" charset="-120"/>
               </a:rPr>
-              <a:t>A   He was a slave trader who made money from the trade, so he wanted Parliament to let it continue</a:t>
+              <a:t>B   He was a slave trader who made money from the trade, so he wanted Parliament to let it continue</a:t>
             </a:r>
             <a:endParaRPr lang="en-US" sz="2200" dirty="0"/>
           </a:p>

--- a/decks/hist-slave-trade/hist-slave-trade_ch6_sources.pptx
+++ b/decks/hist-slave-trade/hist-slave-trade_ch6_sources.pptx
@@ -129,31 +129,31 @@
   <p:extLst>
     <p:ext uri="{521415D9-36F7-43E2-AB2F-B90AF26B5E84}">
       <p14:sectionLst xmlns:p14="http://schemas.microsoft.com/office/powerpoint/2010/main">
-        <p14:section name="Opening" id="{83586428-00ed-5b46-7863-7ad45a2d5832}">
+        <p14:section name="Opening" id="{b554af8a-8872-3cf8-1fb4-2083c2b48fc5}">
           <p14:sldIdLst>
             <p14:sldId id="256"/>
           </p14:sldIdLst>
         </p14:section>
-        <p14:section name="Gate" id="{22c9d102-0734-0878-76da-64a4cd6209e3}">
+        <p14:section name="Gate" id="{4a554fc9-7b1c-836f-9957-7559b203348a}">
           <p14:sldIdLst>
             <p14:sldId id="257"/>
             <p14:sldId id="258"/>
             <p14:sldId id="259"/>
           </p14:sldIdLst>
         </p14:section>
-        <p14:section name="Pre-teach" id="{126c9a6e-1815-0221-ad71-5d2fde29e16c}">
+        <p14:section name="Pre-teach" id="{3affd589-3e9d-7c8c-f3f1-9451dc16ee84}">
           <p14:sldIdLst>
             <p14:sldId id="260"/>
             <p14:sldId id="261"/>
           </p14:sldIdLst>
         </p14:section>
-        <p14:section name="Read-along" id="{dc69f4af-7fad-73b0-74a8-aa975901595b}">
+        <p14:section name="Read-along" id="{ef14b9d3-9145-37a5-155f-3006f4232f12}">
           <p14:sldIdLst>
             <p14:sldId id="262"/>
             <p14:sldId id="263"/>
           </p14:sldIdLst>
         </p14:section>
-        <p14:section name="Teach" id="{d0be9f58-7fc8-a4c2-5940-007690e8e844}">
+        <p14:section name="Teach" id="{980b7ba7-2e57-207b-caa8-9ebc8785ca20}">
           <p14:sldIdLst>
             <p14:sldId id="264"/>
             <p14:sldId id="265"/>
@@ -162,7 +162,7 @@
             <p14:sldId id="268"/>
           </p14:sldIdLst>
         </p14:section>
-        <p14:section name="Routes" id="{8f1aaf02-d749-1a3f-03c1-120e3946210c}">
+        <p14:section name="Routes" id="{786b7c92-48ba-603b-4424-26908c187e9e}">
           <p14:sldIdLst>
             <p14:sldId id="269"/>
             <p14:sldId id="270"/>
@@ -171,12 +171,12 @@
             <p14:sldId id="273"/>
           </p14:sldIdLst>
         </p14:section>
-        <p14:section name="Close" id="{4fd63539-cc96-f832-f934-ed33692534a8}">
+        <p14:section name="Close" id="{6c8dbaee-36e0-d3c7-0dd0-aa5a236382b4}">
           <p14:sldIdLst>
             <p14:sldId id="274"/>
           </p14:sldIdLst>
         </p14:section>
-        <p14:section name="Answers" id="{6a3a2823-ede2-b435-5355-5e70016be5b9}">
+        <p14:section name="Answers" id="{8da7483e-6a96-59d2-bf85-ab4badc7991b}">
           <p14:sldIdLst>
             <p14:sldId id="275"/>
             <p14:sldId id="276"/>
